--- a/media/exports/reports/2026-03/growth-trades.pptx
+++ b/media/exports/reports/2026-03/growth-trades.pptx
@@ -228,58 +228,58 @@
                 <c:formatCode>$#,##0;[Red]($#,##0);"-"</c:formatCode>
                 <c:ptCount val="18"/>
                 <c:pt idx="0">
-                  <c:v>171009</c:v>
+                  <c:v>191014</c:v>
                 </c:pt>
                 <c:pt idx="1">
-                  <c:v>179474</c:v>
+                  <c:v>200124</c:v>
                 </c:pt>
                 <c:pt idx="2">
-                  <c:v>143156</c:v>
+                  <c:v>159406</c:v>
                 </c:pt>
                 <c:pt idx="3">
-                  <c:v>140909</c:v>
+                  <c:v>156794</c:v>
                 </c:pt>
                 <c:pt idx="4">
-                  <c:v>160943</c:v>
+                  <c:v>179190</c:v>
                 </c:pt>
                 <c:pt idx="5">
-                  <c:v>135082</c:v>
+                  <c:v>150465</c:v>
                 </c:pt>
                 <c:pt idx="6">
-                  <c:v>124705</c:v>
+                  <c:v>138865</c:v>
                 </c:pt>
                 <c:pt idx="7">
-                  <c:v>129816</c:v>
+                  <c:v>144649</c:v>
                 </c:pt>
                 <c:pt idx="8">
-                  <c:v>164113</c:v>
+                  <c:v>183265</c:v>
                 </c:pt>
                 <c:pt idx="9">
-                  <c:v>186760</c:v>
+                  <c:v>208588</c:v>
                 </c:pt>
                 <c:pt idx="10">
-                  <c:v>139164</c:v>
+                  <c:v>155118</c:v>
                 </c:pt>
                 <c:pt idx="11">
-                  <c:v>128255</c:v>
+                  <c:v>143077</c:v>
                 </c:pt>
                 <c:pt idx="12">
-                  <c:v>128898</c:v>
+                  <c:v>143566</c:v>
                 </c:pt>
                 <c:pt idx="13">
-                  <c:v>174786</c:v>
+                  <c:v>194966</c:v>
                 </c:pt>
                 <c:pt idx="14">
-                  <c:v>135079</c:v>
+                  <c:v>150283</c:v>
                 </c:pt>
                 <c:pt idx="15">
-                  <c:v>164780</c:v>
+                  <c:v>183306</c:v>
                 </c:pt>
                 <c:pt idx="16">
-                  <c:v>196372</c:v>
+                  <c:v>218908</c:v>
                 </c:pt>
                 <c:pt idx="17">
-                  <c:v>191500</c:v>
+                  <c:v>213578</c:v>
                 </c:pt>
               </c:numCache>
             </c:numRef>
@@ -504,58 +504,58 @@
                 <c:formatCode>$#,##0;[Red]($#,##0);"-"</c:formatCode>
                 <c:ptCount val="18"/>
                 <c:pt idx="0">
-                  <c:v>24670</c:v>
+                  <c:v>27650</c:v>
                 </c:pt>
                 <c:pt idx="1">
-                  <c:v>24670</c:v>
+                  <c:v>27650</c:v>
                 </c:pt>
                 <c:pt idx="2">
-                  <c:v>24670</c:v>
+                  <c:v>27650</c:v>
                 </c:pt>
                 <c:pt idx="3">
-                  <c:v>24670</c:v>
+                  <c:v>27650</c:v>
                 </c:pt>
                 <c:pt idx="4">
-                  <c:v>27930</c:v>
+                  <c:v>31300</c:v>
                 </c:pt>
                 <c:pt idx="5">
-                  <c:v>27930</c:v>
+                  <c:v>31300</c:v>
                 </c:pt>
                 <c:pt idx="6">
-                  <c:v>27930</c:v>
+                  <c:v>31300</c:v>
                 </c:pt>
                 <c:pt idx="7">
-                  <c:v>27930</c:v>
+                  <c:v>31300</c:v>
                 </c:pt>
                 <c:pt idx="8">
-                  <c:v>31870</c:v>
+                  <c:v>35720</c:v>
                 </c:pt>
                 <c:pt idx="9">
-                  <c:v>33200</c:v>
+                  <c:v>37200</c:v>
                 </c:pt>
                 <c:pt idx="10">
-                  <c:v>33200</c:v>
+                  <c:v>37200</c:v>
                 </c:pt>
                 <c:pt idx="11">
-                  <c:v>33200</c:v>
+                  <c:v>37200</c:v>
                 </c:pt>
                 <c:pt idx="12">
-                  <c:v>35800</c:v>
+                  <c:v>40100</c:v>
                 </c:pt>
                 <c:pt idx="13">
-                  <c:v>35800</c:v>
+                  <c:v>40100</c:v>
                 </c:pt>
                 <c:pt idx="14">
-                  <c:v>35800</c:v>
+                  <c:v>40100</c:v>
                 </c:pt>
                 <c:pt idx="15">
-                  <c:v>35800</c:v>
+                  <c:v>40100</c:v>
                 </c:pt>
                 <c:pt idx="16">
-                  <c:v>37500</c:v>
+                  <c:v>42000</c:v>
                 </c:pt>
                 <c:pt idx="17">
-                  <c:v>37500</c:v>
+                  <c:v>42000</c:v>
                 </c:pt>
               </c:numCache>
             </c:numRef>
@@ -604,7 +604,7 @@
         <c:axId val="-2100718248"/>
         <c:scaling>
           <c:orientation val="minMax"/>
-          <c:max val="40000.0"/>
+          <c:max val="50000.0"/>
           <c:min val="0.0"/>
         </c:scaling>
         <c:delete val="0"/>
@@ -780,58 +780,58 @@
                 <c:formatCode>$#,##0;[Red]($#,##0);"-"</c:formatCode>
                 <c:ptCount val="18"/>
                 <c:pt idx="0">
+                  <c:v>141600</c:v>
+                </c:pt>
+                <c:pt idx="1">
+                  <c:v>147100</c:v>
+                </c:pt>
+                <c:pt idx="2">
+                  <c:v>103700</c:v>
+                </c:pt>
+                <c:pt idx="3">
+                  <c:v>100100</c:v>
+                </c:pt>
+                <c:pt idx="4">
+                  <c:v>118600</c:v>
+                </c:pt>
+                <c:pt idx="5">
+                  <c:v>96400</c:v>
+                </c:pt>
+                <c:pt idx="6">
+                  <c:v>83900</c:v>
+                </c:pt>
+                <c:pt idx="7">
+                  <c:v>89900</c:v>
+                </c:pt>
+                <c:pt idx="8">
                   <c:v>126300</c:v>
                 </c:pt>
-                <c:pt idx="1">
-                  <c:v>131400</c:v>
-                </c:pt>
-                <c:pt idx="2">
-                  <c:v>92600</c:v>
-                </c:pt>
-                <c:pt idx="3">
-                  <c:v>89400</c:v>
-                </c:pt>
-                <c:pt idx="4">
-                  <c:v>106000</c:v>
-                </c:pt>
-                <c:pt idx="5">
-                  <c:v>86100</c:v>
-                </c:pt>
-                <c:pt idx="6">
-                  <c:v>74900</c:v>
-                </c:pt>
-                <c:pt idx="7">
-                  <c:v>80300</c:v>
-                </c:pt>
-                <c:pt idx="8">
-                  <c:v>112700</c:v>
-                </c:pt>
                 <c:pt idx="9">
-                  <c:v>135800</c:v>
+                  <c:v>152100</c:v>
                 </c:pt>
                 <c:pt idx="10">
-                  <c:v>86200</c:v>
+                  <c:v>96500</c:v>
                 </c:pt>
                 <c:pt idx="11">
-                  <c:v>75100</c:v>
+                  <c:v>84200</c:v>
                 </c:pt>
                 <c:pt idx="12">
-                  <c:v>70800</c:v>
+                  <c:v>79300</c:v>
                 </c:pt>
                 <c:pt idx="13">
-                  <c:v>113300</c:v>
+                  <c:v>126900</c:v>
                 </c:pt>
                 <c:pt idx="14">
-                  <c:v>69700</c:v>
+                  <c:v>78100</c:v>
                 </c:pt>
                 <c:pt idx="15">
-                  <c:v>97500</c:v>
+                  <c:v>109100</c:v>
                 </c:pt>
                 <c:pt idx="16">
-                  <c:v>129300</c:v>
+                  <c:v>144800</c:v>
                 </c:pt>
                 <c:pt idx="17">
-                  <c:v>129400</c:v>
+                  <c:v>144900</c:v>
                 </c:pt>
               </c:numCache>
             </c:numRef>
@@ -880,7 +880,7 @@
         <c:axId val="-2100718248"/>
         <c:scaling>
           <c:orientation val="minMax"/>
-          <c:max val="150000.0"/>
+          <c:max val="200000.0"/>
           <c:min val="0.0"/>
         </c:scaling>
         <c:delete val="0"/>
@@ -1056,58 +1056,58 @@
                 <c:formatCode>$#,##0;[Red]($#,##0);"-"</c:formatCode>
                 <c:ptCount val="18"/>
                 <c:pt idx="0">
-                  <c:v>20039</c:v>
+                  <c:v>21764</c:v>
                 </c:pt>
                 <c:pt idx="1">
-                  <c:v>23404</c:v>
+                  <c:v>25374</c:v>
                 </c:pt>
                 <c:pt idx="2">
-                  <c:v>25886</c:v>
+                  <c:v>28056</c:v>
                 </c:pt>
                 <c:pt idx="3">
-                  <c:v>26839</c:v>
+                  <c:v>29044</c:v>
                 </c:pt>
                 <c:pt idx="4">
-                  <c:v>27013</c:v>
+                  <c:v>29290</c:v>
                 </c:pt>
                 <c:pt idx="5">
-                  <c:v>21052</c:v>
+                  <c:v>22765</c:v>
                 </c:pt>
                 <c:pt idx="6">
-                  <c:v>21875</c:v>
+                  <c:v>23665</c:v>
                 </c:pt>
                 <c:pt idx="7">
-                  <c:v>21586</c:v>
+                  <c:v>23449</c:v>
                 </c:pt>
                 <c:pt idx="8">
-                  <c:v>19543</c:v>
+                  <c:v>21245</c:v>
                 </c:pt>
                 <c:pt idx="9">
-                  <c:v>17760</c:v>
+                  <c:v>19288</c:v>
                 </c:pt>
                 <c:pt idx="10">
-                  <c:v>19764</c:v>
+                  <c:v>21418</c:v>
                 </c:pt>
                 <c:pt idx="11">
-                  <c:v>19955</c:v>
+                  <c:v>21677</c:v>
                 </c:pt>
                 <c:pt idx="12">
-                  <c:v>22298</c:v>
+                  <c:v>24166</c:v>
                 </c:pt>
                 <c:pt idx="13">
-                  <c:v>25686</c:v>
+                  <c:v>27966</c:v>
                 </c:pt>
                 <c:pt idx="14">
-                  <c:v>29579</c:v>
+                  <c:v>32083</c:v>
                 </c:pt>
                 <c:pt idx="15">
-                  <c:v>31480</c:v>
+                  <c:v>34106</c:v>
                 </c:pt>
                 <c:pt idx="16">
-                  <c:v>29572</c:v>
+                  <c:v>32108</c:v>
                 </c:pt>
                 <c:pt idx="17">
-                  <c:v>24600</c:v>
+                  <c:v>26678</c:v>
                 </c:pt>
               </c:numCache>
             </c:numRef>
@@ -1681,7 +1681,7 @@
           <a:lstStyle/>
           <a:p>
             <a:r>
-              <a:t>Trades · All. March against March last year: 41.8%; Year to date (Jul to Mar 2026): $1,445,594; Gross margin, year to date: 37.1%. Revenue is $1,445,594 this financial year to date (Jul to Mar 2026). Maintenance contracts make the highest gross margin (59.5%); Installations the lowest (27.7%). The business needs 30.3% gross margin just to cover overheads. Installations: 27.7% gross margin, 7.3 points under the 35.0% target: about $66,607 on $907,100 of revenue this financial year to date. It's below the 30.3% needed to cover overheads, too. Maintenance contracts: 59.5% gross margin, 24.5 points over the 35.0% target ($77,852 ahead on $317,800 this financial year to date).</a:t>
+              <a:t>Trades · All. March against March last year: 41.9%; Year to date (Jul to Mar 2026): $1,611,390; Gross margin, year to date: 43.6%. Revenue is $1,611,390 this financial year to date (Jul to Mar 2026). Maintenance contracts make the highest gross margin (63.8%); Installations the lowest (35.4%). The business needs 38.9% gross margin just to cover overheads. Installations: 35.4% gross margin, 0.4 points over the 35.0% target ($4,113 ahead on $1,015,900 this financial year to date). Maintenance contracts: 63.8% gross margin, 28.8 points over the 35.0% target ($102,682 ahead on $356,000 this financial year to date).</a:t>
             </a:r>
           </a:p>
         </p:txBody>
@@ -1751,7 +1751,7 @@
           <a:lstStyle/>
           <a:p>
             <a:r>
-              <a:t>Trades · Maintenance contracts. March against March last year: 34.3%; Year to date (Jul to Mar 2026): $317,800; Gross margin, year to date: 59.5%. Maintenance contracts brought in $317,800 this financial year to date, at a 59.5% gross margin (above the 37.1% overall). Maintenance contracts: 59.5% gross margin, 24.5 points over the 35.0% target ($77,852 ahead on $317,800 this financial year to date).</a:t>
+              <a:t>Trades · Maintenance contracts. March against March last year: 34.2%; Year to date (Jul to Mar 2026): $356,000; Gross margin, year to date: 63.8%. Maintenance contracts brought in $356,000 this financial year to date, at a 63.8% gross margin (above the 43.6% overall). Maintenance contracts: 63.8% gross margin, 28.8 points over the 35.0% target ($102,682 ahead on $356,000 this financial year to date).</a:t>
             </a:r>
           </a:p>
         </p:txBody>
@@ -1821,7 +1821,7 @@
           <a:lstStyle/>
           <a:p>
             <a:r>
-              <a:t>Trades · Installations. March against March last year: 50.3%; Year to date (Jul to Mar 2026): $907,100; Gross margin, year to date: 27.7%. Installations brought in $907,100 this financial year to date, at a 27.7% gross margin (below the 37.1% overall). Installations: 27.7% gross margin, 7.3 points under the 35.0% target: about $66,607 on $907,100 of revenue this financial year to date. It's below the 30.3% needed to cover overheads, too.</a:t>
+              <a:t>Trades · Installations. March against March last year: 50.3%; Year to date (Jul to Mar 2026): $1,015,900; Gross margin, year to date: 35.4%. Installations brought in $1,015,900 this financial year to date, at a 35.4% gross margin (below the 43.6% overall). Installations: 35.4% gross margin, 0.4 points over the 35.0% target ($4,113 ahead on $1,015,900 this financial year to date).</a:t>
             </a:r>
           </a:p>
         </p:txBody>
@@ -1891,7 +1891,7 @@
           <a:lstStyle/>
           <a:p>
             <a:r>
-              <a:t>Trades · Call-outs and repairs. March against March last year: 16.9%; Year to date (Jul to Mar 2026): $220,694; Gross margin, year to date: 43.7%. Call-outs and repairs brought in $220,694 this financial year to date, at a 43.7% gross margin (above the 37.1% overall). Call-outs and repairs: 43.7% gross margin, 8.7 points over the 35.0% target ($19,139 ahead on $220,694 this financial year to date).</a:t>
+              <a:t>Trades · Call-outs and repairs. March against March last year: 17.2%; Year to date (Jul to Mar 2026): $239,490; Gross margin, year to date: 48.1%. Call-outs and repairs brought in $239,490 this financial year to date, at a 48.1% gross margin (above the 43.6% overall). Call-outs and repairs: 48.1% gross margin, 13.1 points over the 35.0% target ($31,357 ahead on $239,490 this financial year to date).</a:t>
             </a:r>
           </a:p>
         </p:txBody>
@@ -1961,7 +1961,7 @@
           <a:lstStyle/>
           <a:p>
             <a:r>
-              <a:t>By line: financial year to date (Jul to Mar 2026) against the same period last year · Trades. Same period last year: Not available: the data starts October 2024. From gross margin to profit: March's jobs made $68,158 gross margin (35.6%). Technician time not charged to jobs took ($1,092) and overheads $59,200, leaving $10,050 profit before tax (5.2% of revenue). To cover overheads, jobs need a 30.3% gross margin on average.</a:t>
+              <a:t>By line: financial year to date (Jul to Mar 2026) against the same period last year · Trades. Same period last year: Not available: the data starts October 2024. From gross margin to profit: March's jobs made $90,236 gross margin (42.2%). Technician time not charged to jobs took $23,895 and overheads $59,200, leaving $7,141 profit before tax (3.3% of revenue). To cover overheads, jobs need a 38.9% gross margin on average.</a:t>
             </a:r>
           </a:p>
         </p:txBody>
@@ -5376,7 +5376,7 @@
                 </a:solidFill>
                 <a:latin typeface="Roboto"/>
               </a:rPr>
-              <a:t>Data retrieved 2pm, Tue 6 Oct 2026 · Generated 8 Oct 2026, 9:35am · Sample data · Made with Python (python-pptx)</a:t>
+              <a:t>Data retrieved 2pm, Tue 6 Oct 2026 · Generated 9 Oct 2026, 8:41am · Sample data · Made with Python (python-pptx)</a:t>
             </a:r>
           </a:p>
         </p:txBody>
@@ -5722,7 +5722,7 @@
                 </a:solidFill>
                 <a:latin typeface="Roboto"/>
               </a:rPr>
-              <a:t>41.8%</a:t>
+              <a:t>41.9%</a:t>
             </a:r>
           </a:p>
         </p:txBody>
@@ -5761,7 +5761,7 @@
                 </a:solidFill>
                 <a:latin typeface="Roboto"/>
               </a:rPr>
-              <a:t>$191,500 against $135,082</a:t>
+              <a:t>$213,578 against $150,465</a:t>
             </a:r>
           </a:p>
         </p:txBody>
@@ -5888,7 +5888,7 @@
                 </a:solidFill>
                 <a:latin typeface="Roboto"/>
               </a:rPr>
-              <a:t>$1,445,594</a:t>
+              <a:t>$1,611,390</a:t>
             </a:r>
           </a:p>
         </p:txBody>
@@ -6054,7 +6054,7 @@
                 </a:solidFill>
                 <a:latin typeface="Roboto"/>
               </a:rPr>
-              <a:t>37.1%</a:t>
+              <a:t>43.6%</a:t>
             </a:r>
           </a:p>
         </p:txBody>
@@ -6093,7 +6093,7 @@
                 </a:solidFill>
                 <a:latin typeface="Roboto"/>
               </a:rPr>
-              <a:t>$536,342 before overheads</a:t>
+              <a:t>$702,138 before overheads</a:t>
             </a:r>
           </a:p>
         </p:txBody>
@@ -6108,7 +6108,7 @@
         </p:nvGraphicFramePr>
         <p:xfrm>
           <a:off x="457200" y="2604516"/>
-          <a:ext cx="11277295" cy="2119884"/>
+          <a:ext cx="11277295" cy="2318004"/>
         </p:xfrm>
         <a:graphic>
           <a:graphicData uri="http://schemas.openxmlformats.org/drawingml/2006/chart">
@@ -6124,8 +6124,8 @@
         </p:nvSpPr>
         <p:spPr>
           <a:xfrm>
-            <a:off x="457200" y="4815840"/>
-            <a:ext cx="5501487" cy="1493520"/>
+            <a:off x="457200" y="5013960"/>
+            <a:ext cx="5501487" cy="1295400"/>
           </a:xfrm>
           <a:prstGeom prst="rect">
             <a:avLst/>
@@ -6173,7 +6173,7 @@
         </p:nvSpPr>
         <p:spPr>
           <a:xfrm>
-            <a:off x="594360" y="4870704"/>
+            <a:off x="594360" y="5068824"/>
             <a:ext cx="5227167" cy="274320"/>
           </a:xfrm>
           <a:prstGeom prst="rect">
@@ -6212,8 +6212,8 @@
         </p:nvSpPr>
         <p:spPr>
           <a:xfrm>
-            <a:off x="594360" y="5145024"/>
-            <a:ext cx="5227167" cy="1127760"/>
+            <a:off x="594360" y="5343144"/>
+            <a:ext cx="5227167" cy="929640"/>
           </a:xfrm>
           <a:prstGeom prst="rect">
             <a:avLst/>
@@ -6238,7 +6238,7 @@
                 </a:solidFill>
                 <a:latin typeface="Roboto"/>
               </a:rPr>
-              <a:t>Revenue is $1,445,594 this financial year to date (Jul to Mar 2026). Maintenance contracts make the highest gross margin (59.5%); Installations the lowest (27.7%). The business needs 30.3% gross margin just to cover overheads.</a:t>
+              <a:t>Revenue is $1,611,390 this financial year to date (Jul to Mar 2026). Maintenance contracts make the highest gross margin (63.8%); Installations the lowest (35.4%). The business needs 38.9% gross margin just to cover overheads.</a:t>
             </a:r>
           </a:p>
         </p:txBody>
@@ -6251,8 +6251,8 @@
         </p:nvSpPr>
         <p:spPr>
           <a:xfrm>
-            <a:off x="6233007" y="4815840"/>
-            <a:ext cx="5501487" cy="1493520"/>
+            <a:off x="6233007" y="5013960"/>
+            <a:ext cx="5501487" cy="1295400"/>
           </a:xfrm>
           <a:prstGeom prst="rect">
             <a:avLst/>
@@ -6300,7 +6300,7 @@
         </p:nvSpPr>
         <p:spPr>
           <a:xfrm>
-            <a:off x="6370167" y="4870704"/>
+            <a:off x="6370167" y="5068824"/>
             <a:ext cx="5227167" cy="274320"/>
           </a:xfrm>
           <a:prstGeom prst="rect">
@@ -6339,8 +6339,8 @@
         </p:nvSpPr>
         <p:spPr>
           <a:xfrm>
-            <a:off x="6370167" y="5145024"/>
-            <a:ext cx="5227167" cy="1127760"/>
+            <a:off x="6370167" y="5343144"/>
+            <a:ext cx="5227167" cy="929640"/>
           </a:xfrm>
           <a:prstGeom prst="rect">
             <a:avLst/>
@@ -6365,7 +6365,7 @@
                 </a:solidFill>
                 <a:latin typeface="Roboto"/>
               </a:rPr>
-              <a:t>Installations: 27.7% gross margin, 7.3 points under the 35.0% target: about $66,607 on $907,100 of revenue this financial year to date. It's below the 30.3% needed to cover overheads, too. Maintenance contracts: 59.5% gross margin, 24.5 points over the 35.0% target ($77,852 ahead on $317,800 this financial year to date).</a:t>
+              <a:t>Installations: 35.4% gross margin, 0.4 points over the 35.0% target ($4,113 ahead on $1,015,900 this financial year to date). Maintenance contracts: 63.8% gross margin, 28.8 points over the 35.0% target ($102,682 ahead on $356,000 this financial year to date).</a:t>
             </a:r>
           </a:p>
         </p:txBody>
@@ -6443,7 +6443,7 @@
                 </a:solidFill>
                 <a:latin typeface="Roboto"/>
               </a:rPr>
-              <a:t>Data retrieved 2pm, Tue 6 Oct 2026 · Generated 8 Oct 2026, 9:35am · Sample data · Made with Python (python-pptx)</a:t>
+              <a:t>Data retrieved 2pm, Tue 6 Oct 2026 · Generated 9 Oct 2026, 8:41am · Sample data · Made with Python (python-pptx)</a:t>
             </a:r>
           </a:p>
         </p:txBody>
@@ -6789,7 +6789,7 @@
                 </a:solidFill>
                 <a:latin typeface="Roboto"/>
               </a:rPr>
-              <a:t>34.3%</a:t>
+              <a:t>34.2%</a:t>
             </a:r>
           </a:p>
         </p:txBody>
@@ -6828,7 +6828,7 @@
                 </a:solidFill>
                 <a:latin typeface="Roboto"/>
               </a:rPr>
-              <a:t>$37,500 against $27,930</a:t>
+              <a:t>$42,000 against $31,300</a:t>
             </a:r>
           </a:p>
         </p:txBody>
@@ -6955,7 +6955,7 @@
                 </a:solidFill>
                 <a:latin typeface="Roboto"/>
               </a:rPr>
-              <a:t>$317,800</a:t>
+              <a:t>$356,000</a:t>
             </a:r>
           </a:p>
         </p:txBody>
@@ -7121,7 +7121,7 @@
                 </a:solidFill>
                 <a:latin typeface="Roboto"/>
               </a:rPr>
-              <a:t>59.5%</a:t>
+              <a:t>63.8%</a:t>
             </a:r>
           </a:p>
         </p:txBody>
@@ -7160,7 +7160,7 @@
                 </a:solidFill>
                 <a:latin typeface="Roboto"/>
               </a:rPr>
-              <a:t>$189,082 before overheads</a:t>
+              <a:t>$227,282 before overheads</a:t>
             </a:r>
           </a:p>
         </p:txBody>
@@ -7305,7 +7305,7 @@
                 </a:solidFill>
                 <a:latin typeface="Roboto"/>
               </a:rPr>
-              <a:t>Maintenance contracts brought in $317,800 this financial year to date, at a 59.5% gross margin (above the 37.1% overall).</a:t>
+              <a:t>Maintenance contracts brought in $356,000 this financial year to date, at a 63.8% gross margin (above the 43.6% overall).</a:t>
             </a:r>
           </a:p>
         </p:txBody>
@@ -7432,7 +7432,7 @@
                 </a:solidFill>
                 <a:latin typeface="Roboto"/>
               </a:rPr>
-              <a:t>Maintenance contracts: 59.5% gross margin, 24.5 points over the 35.0% target ($77,852 ahead on $317,800 this financial year to date).</a:t>
+              <a:t>Maintenance contracts: 63.8% gross margin, 28.8 points over the 35.0% target ($102,682 ahead on $356,000 this financial year to date).</a:t>
             </a:r>
           </a:p>
         </p:txBody>
@@ -7510,7 +7510,7 @@
                 </a:solidFill>
                 <a:latin typeface="Roboto"/>
               </a:rPr>
-              <a:t>Data retrieved 2pm, Tue 6 Oct 2026 · Generated 8 Oct 2026, 9:35am · Sample data · Made with Python (python-pptx)</a:t>
+              <a:t>Data retrieved 2pm, Tue 6 Oct 2026 · Generated 9 Oct 2026, 8:41am · Sample data · Made with Python (python-pptx)</a:t>
             </a:r>
           </a:p>
         </p:txBody>
@@ -7895,7 +7895,7 @@
                 </a:solidFill>
                 <a:latin typeface="Roboto"/>
               </a:rPr>
-              <a:t>$129,400 against $86,100</a:t>
+              <a:t>$144,900 against $96,400</a:t>
             </a:r>
           </a:p>
         </p:txBody>
@@ -8022,7 +8022,7 @@
                 </a:solidFill>
                 <a:latin typeface="Roboto"/>
               </a:rPr>
-              <a:t>$907,100</a:t>
+              <a:t>$1,015,900</a:t>
             </a:r>
           </a:p>
         </p:txBody>
@@ -8188,7 +8188,7 @@
                 </a:solidFill>
                 <a:latin typeface="Roboto"/>
               </a:rPr>
-              <a:t>27.7%</a:t>
+              <a:t>35.4%</a:t>
             </a:r>
           </a:p>
         </p:txBody>
@@ -8227,7 +8227,7 @@
                 </a:solidFill>
                 <a:latin typeface="Roboto"/>
               </a:rPr>
-              <a:t>$250,878 before overheads</a:t>
+              <a:t>$359,678 before overheads</a:t>
             </a:r>
           </a:p>
         </p:txBody>
@@ -8242,7 +8242,7 @@
         </p:nvGraphicFramePr>
         <p:xfrm>
           <a:off x="457200" y="2604516"/>
-          <a:ext cx="11277295" cy="2516124"/>
+          <a:ext cx="11277295" cy="2714244"/>
         </p:xfrm>
         <a:graphic>
           <a:graphicData uri="http://schemas.openxmlformats.org/drawingml/2006/chart">
@@ -8258,8 +8258,8 @@
         </p:nvSpPr>
         <p:spPr>
           <a:xfrm>
-            <a:off x="457200" y="5212080"/>
-            <a:ext cx="5501487" cy="1097280"/>
+            <a:off x="457200" y="5410200"/>
+            <a:ext cx="5501487" cy="899160"/>
           </a:xfrm>
           <a:prstGeom prst="rect">
             <a:avLst/>
@@ -8307,7 +8307,7 @@
         </p:nvSpPr>
         <p:spPr>
           <a:xfrm>
-            <a:off x="594360" y="5266944"/>
+            <a:off x="594360" y="5465064"/>
             <a:ext cx="5227167" cy="274320"/>
           </a:xfrm>
           <a:prstGeom prst="rect">
@@ -8346,8 +8346,8 @@
         </p:nvSpPr>
         <p:spPr>
           <a:xfrm>
-            <a:off x="594360" y="5541264"/>
-            <a:ext cx="5227167" cy="731520"/>
+            <a:off x="594360" y="5739384"/>
+            <a:ext cx="5227167" cy="533400"/>
           </a:xfrm>
           <a:prstGeom prst="rect">
             <a:avLst/>
@@ -8372,7 +8372,7 @@
                 </a:solidFill>
                 <a:latin typeface="Roboto"/>
               </a:rPr>
-              <a:t>Installations brought in $907,100 this financial year to date, at a 27.7% gross margin (below the 37.1% overall).</a:t>
+              <a:t>Installations brought in $1,015,900 this financial year to date, at a 35.4% gross margin (below the 43.6% overall).</a:t>
             </a:r>
           </a:p>
         </p:txBody>
@@ -8385,8 +8385,8 @@
         </p:nvSpPr>
         <p:spPr>
           <a:xfrm>
-            <a:off x="6233007" y="5212080"/>
-            <a:ext cx="5501487" cy="1097280"/>
+            <a:off x="6233007" y="5410200"/>
+            <a:ext cx="5501487" cy="899160"/>
           </a:xfrm>
           <a:prstGeom prst="rect">
             <a:avLst/>
@@ -8434,7 +8434,7 @@
         </p:nvSpPr>
         <p:spPr>
           <a:xfrm>
-            <a:off x="6370167" y="5266944"/>
+            <a:off x="6370167" y="5465064"/>
             <a:ext cx="5227167" cy="274320"/>
           </a:xfrm>
           <a:prstGeom prst="rect">
@@ -8473,8 +8473,8 @@
         </p:nvSpPr>
         <p:spPr>
           <a:xfrm>
-            <a:off x="6370167" y="5541264"/>
-            <a:ext cx="5227167" cy="731520"/>
+            <a:off x="6370167" y="5739384"/>
+            <a:ext cx="5227167" cy="533400"/>
           </a:xfrm>
           <a:prstGeom prst="rect">
             <a:avLst/>
@@ -8499,7 +8499,7 @@
                 </a:solidFill>
                 <a:latin typeface="Roboto"/>
               </a:rPr>
-              <a:t>Installations: 27.7% gross margin, 7.3 points under the 35.0% target: about $66,607 on $907,100 of revenue this financial year to date. It's below the 30.3% needed to cover overheads, too.</a:t>
+              <a:t>Installations: 35.4% gross margin, 0.4 points over the 35.0% target ($4,113 ahead on $1,015,900 this financial year to date).</a:t>
             </a:r>
           </a:p>
         </p:txBody>
@@ -8577,7 +8577,7 @@
                 </a:solidFill>
                 <a:latin typeface="Roboto"/>
               </a:rPr>
-              <a:t>Data retrieved 2pm, Tue 6 Oct 2026 · Generated 8 Oct 2026, 9:35am · Sample data · Made with Python (python-pptx)</a:t>
+              <a:t>Data retrieved 2pm, Tue 6 Oct 2026 · Generated 9 Oct 2026, 8:41am · Sample data · Made with Python (python-pptx)</a:t>
             </a:r>
           </a:p>
         </p:txBody>
@@ -8923,7 +8923,7 @@
                 </a:solidFill>
                 <a:latin typeface="Roboto"/>
               </a:rPr>
-              <a:t>16.9%</a:t>
+              <a:t>17.2%</a:t>
             </a:r>
           </a:p>
         </p:txBody>
@@ -8962,7 +8962,7 @@
                 </a:solidFill>
                 <a:latin typeface="Roboto"/>
               </a:rPr>
-              <a:t>$24,600 against $21,052</a:t>
+              <a:t>$26,678 against $22,765</a:t>
             </a:r>
           </a:p>
         </p:txBody>
@@ -9089,7 +9089,7 @@
                 </a:solidFill>
                 <a:latin typeface="Roboto"/>
               </a:rPr>
-              <a:t>$220,694</a:t>
+              <a:t>$239,490</a:t>
             </a:r>
           </a:p>
         </p:txBody>
@@ -9255,7 +9255,7 @@
                 </a:solidFill>
                 <a:latin typeface="Roboto"/>
               </a:rPr>
-              <a:t>43.7%</a:t>
+              <a:t>48.1%</a:t>
             </a:r>
           </a:p>
         </p:txBody>
@@ -9294,7 +9294,7 @@
                 </a:solidFill>
                 <a:latin typeface="Roboto"/>
               </a:rPr>
-              <a:t>$96,382 before overheads</a:t>
+              <a:t>$115,178 before overheads</a:t>
             </a:r>
           </a:p>
         </p:txBody>
@@ -9439,7 +9439,7 @@
                 </a:solidFill>
                 <a:latin typeface="Roboto"/>
               </a:rPr>
-              <a:t>Call-outs and repairs brought in $220,694 this financial year to date, at a 43.7% gross margin (above the 37.1% overall).</a:t>
+              <a:t>Call-outs and repairs brought in $239,490 this financial year to date, at a 48.1% gross margin (above the 43.6% overall).</a:t>
             </a:r>
           </a:p>
         </p:txBody>
@@ -9566,7 +9566,7 @@
                 </a:solidFill>
                 <a:latin typeface="Roboto"/>
               </a:rPr>
-              <a:t>Call-outs and repairs: 43.7% gross margin, 8.7 points over the 35.0% target ($19,139 ahead on $220,694 this financial year to date).</a:t>
+              <a:t>Call-outs and repairs: 48.1% gross margin, 13.1 points over the 35.0% target ($31,357 ahead on $239,490 this financial year to date).</a:t>
             </a:r>
           </a:p>
         </p:txBody>
@@ -9644,7 +9644,7 @@
                 </a:solidFill>
                 <a:latin typeface="Roboto"/>
               </a:rPr>
-              <a:t>Data retrieved 2pm, Tue 6 Oct 2026 · Generated 8 Oct 2026, 9:35am · Sample data · Made with Python (python-pptx)</a:t>
+              <a:t>Data retrieved 2pm, Tue 6 Oct 2026 · Generated 9 Oct 2026, 8:41am · Sample data · Made with Python (python-pptx)</a:t>
             </a:r>
           </a:p>
         </p:txBody>
@@ -9863,7 +9863,7 @@
                 </a:solidFill>
                 <a:latin typeface="Roboto"/>
               </a:rPr>
-              <a:t>Same period last year: Not available: the data starts October 2024. From gross margin to profit: March's jobs made $68,158 gross margin (35.6%). Technician time not charged to jobs took ($1,092) and overheads $59,200, leaving $10,050 profit before tax (5.2% of revenue). To cover overheads, jobs need a 30.3% gross margin on average.</a:t>
+              <a:t>Same period last year: Not available: the data starts October 2024. From gross margin to profit: March's jobs made $90,236 gross margin (42.2%). Technician time not charged to jobs took $23,895 and overheads $59,200, leaving $7,141 profit before tax (3.3% of revenue). To cover overheads, jobs need a 38.9% gross margin on average.</a:t>
             </a:r>
           </a:p>
         </p:txBody>
@@ -10094,7 +10094,7 @@
                           </a:solidFill>
                           <a:latin typeface="Roboto"/>
                         </a:rPr>
-                        <a:t>$317,800</a:t>
+                        <a:t>$356,000</a:t>
                       </a:r>
                     </a:p>
                   </a:txBody>
@@ -10175,7 +10175,7 @@
                           </a:solidFill>
                           <a:latin typeface="Roboto"/>
                         </a:rPr>
-                        <a:t>$189,082</a:t>
+                        <a:t>$227,282</a:t>
                       </a:r>
                     </a:p>
                   </a:txBody>
@@ -10202,7 +10202,7 @@
                           </a:solidFill>
                           <a:latin typeface="Roboto"/>
                         </a:rPr>
-                        <a:t>59.5%</a:t>
+                        <a:t>63.8%</a:t>
                       </a:r>
                     </a:p>
                   </a:txBody>
@@ -10258,7 +10258,7 @@
                           </a:solidFill>
                           <a:latin typeface="Roboto"/>
                         </a:rPr>
-                        <a:t>$907,100</a:t>
+                        <a:t>$1,015,900</a:t>
                       </a:r>
                     </a:p>
                   </a:txBody>
@@ -10339,7 +10339,7 @@
                           </a:solidFill>
                           <a:latin typeface="Roboto"/>
                         </a:rPr>
-                        <a:t>$250,878</a:t>
+                        <a:t>$359,678</a:t>
                       </a:r>
                     </a:p>
                   </a:txBody>
@@ -10366,7 +10366,7 @@
                           </a:solidFill>
                           <a:latin typeface="Roboto"/>
                         </a:rPr>
-                        <a:t>27.7%</a:t>
+                        <a:t>35.4%</a:t>
                       </a:r>
                     </a:p>
                   </a:txBody>
@@ -10422,7 +10422,7 @@
                           </a:solidFill>
                           <a:latin typeface="Roboto"/>
                         </a:rPr>
-                        <a:t>$220,694</a:t>
+                        <a:t>$239,490</a:t>
                       </a:r>
                     </a:p>
                   </a:txBody>
@@ -10503,7 +10503,7 @@
                           </a:solidFill>
                           <a:latin typeface="Roboto"/>
                         </a:rPr>
-                        <a:t>$96,382</a:t>
+                        <a:t>$115,178</a:t>
                       </a:r>
                     </a:p>
                   </a:txBody>
@@ -10530,7 +10530,7 @@
                           </a:solidFill>
                           <a:latin typeface="Roboto"/>
                         </a:rPr>
-                        <a:t>43.7%</a:t>
+                        <a:t>48.1%</a:t>
                       </a:r>
                     </a:p>
                   </a:txBody>
@@ -10586,7 +10586,7 @@
                           </a:solidFill>
                           <a:latin typeface="Roboto"/>
                         </a:rPr>
-                        <a:t>$1,445,594</a:t>
+                        <a:t>$1,611,390</a:t>
                       </a:r>
                     </a:p>
                   </a:txBody>
@@ -10667,7 +10667,7 @@
                           </a:solidFill>
                           <a:latin typeface="Roboto"/>
                         </a:rPr>
-                        <a:t>$536,342</a:t>
+                        <a:t>$702,138</a:t>
                       </a:r>
                     </a:p>
                   </a:txBody>
@@ -10694,7 +10694,7 @@
                           </a:solidFill>
                           <a:latin typeface="Roboto"/>
                         </a:rPr>
-                        <a:t>37.1%</a:t>
+                        <a:t>43.6%</a:t>
                       </a:r>
                     </a:p>
                   </a:txBody>
@@ -10782,7 +10782,7 @@
                 </a:solidFill>
                 <a:latin typeface="Roboto"/>
               </a:rPr>
-              <a:t>Data retrieved 2pm, Tue 6 Oct 2026 · Generated 8 Oct 2026, 9:35am · Sample data · Made with Python (python-pptx)</a:t>
+              <a:t>Data retrieved 2pm, Tue 6 Oct 2026 · Generated 9 Oct 2026, 8:41am · Sample data · Made with Python (python-pptx)</a:t>
             </a:r>
           </a:p>
         </p:txBody>
